--- a/presentations/output/Hypershift_Datasets_Midpoint_v2.pptx
+++ b/presentations/output/Hypershift_Datasets_Midpoint_v2.pptx
@@ -3434,7 +3434,7 @@
                           <a:ea typeface="Arial"/>
                           <a:cs typeface="Arial"/>
                         </a:rPr>
-                        <a:t>SPY and QQQ</a:t>
+                        <a:t>Cohort controls</a:t>
                       </a:r>
                     </a:p>
                   </a:txBody>
@@ -3458,7 +3458,7 @@
                           <a:ea typeface="Arial"/>
                           <a:cs typeface="Arial"/>
                         </a:rPr>
-                        <a:t>2 ETFs</a:t>
+                        <a:t>3 controls</a:t>
                       </a:r>
                     </a:p>
                   </a:txBody>
@@ -3482,7 +3482,7 @@
                           <a:ea typeface="Arial"/>
                           <a:cs typeface="Arial"/>
                         </a:rPr>
-                        <a:t>Both available</a:t>
+                        <a:t>2022–2025</a:t>
                       </a:r>
                     </a:p>
                   </a:txBody>
@@ -5188,7 +5188,7 @@
                 <a:ea typeface="Arial"/>
                 <a:cs typeface="Arial"/>
               </a:rPr>
-              <a:t>Controls: SPY (S&amp;P 500) and QQQ (Nasdaq-100), evaluated on each model’s dates.</a:t>
+              <a:t>NYSE: simulated basket. NASDAQ: QQQ. SPY: broad market. NYSX has no 2022–2025 history.</a:t>
             </a:r>
           </a:p>
         </p:txBody>
